--- a/cowork/sj/claude/23_TEAM_DECK.pptx
+++ b/cowork/sj/claude/23_TEAM_DECK.pptx
@@ -5425,7 +5425,7 @@
                 <a:ea typeface="Calibri" pitchFamily="34" charset="-122"/>
                 <a:cs typeface="Calibri" pitchFamily="34" charset="-120"/>
               </a:rPr>
-              <a:t>멤버의 가치는 정확도가 아니라 비상관성</a:t>
+              <a:t>정확도가 비슷한 멤버들 사이에서는 비상관성이 결정한다</a:t>
             </a:r>
             <a:endParaRPr lang="en-US" sz="1450" dirty="0"/>
           </a:p>
@@ -5467,7 +5467,7 @@
                 <a:ea typeface="Calibri" pitchFamily="34" charset="-122"/>
                 <a:cs typeface="Calibri" pitchFamily="34" charset="-120"/>
               </a:rPr>
-              <a:t>같은 피처로 만든 직접 모델이 단독 751.20 으로 성분 분해(745.30)보다 좋은데, 결합은 +23.43 vs +41.04 로 밀렸다. 차이는 base 와의 상관뿐(0.8529 vs 0.8219).</a:t>
+              <a:t>직접 모델이 단독 751.20 으로 성분 분해(745.30)보다 나은데 결합은 +23.43 vs +41.04 로 밀렸다 — 차이는 상관뿐. 단 정확도가 무너지면 예외다: V70 은 상관 0.6032(역대 최저)를 얻고도 단독이 653 떨어져 −76.56.</a:t>
             </a:r>
             <a:endParaRPr lang="en-US" sz="1150" dirty="0"/>
           </a:p>
@@ -5506,7 +5506,7 @@
                 <a:ea typeface="Calibri" pitchFamily="34" charset="-122"/>
                 <a:cs typeface="Calibri" pitchFamily="34" charset="-120"/>
               </a:rPr>
-              <a:t>V65 · V66</a:t>
+              <a:t>V65 · V66 · V70</a:t>
             </a:r>
             <a:endParaRPr lang="en-US" sz="1100" dirty="0"/>
           </a:p>
